--- a/Optimisation des charges sociales - Ayming.pptx
+++ b/Optimisation des charges sociales - Ayming.pptx
@@ -3267,8 +3267,8 @@
         </p:nvSpPr>
         <p:spPr>
           <a:xfrm>
-            <a:off x="4381390" y="1835451"/>
-            <a:ext cx="3428914" cy="3602145"/>
+            <a:off x="4251328" y="1738412"/>
+            <a:ext cx="3689038" cy="3875412"/>
           </a:xfrm>
           <a:prstGeom prst="rect">
             <a:avLst/>
@@ -3357,8 +3357,8 @@
         </p:nvSpPr>
         <p:spPr>
           <a:xfrm>
-            <a:off x="857228" y="1441959"/>
-            <a:ext cx="3314617" cy="4000399"/>
+            <a:off x="459816" y="1315075"/>
+            <a:ext cx="3566070" cy="4303877"/>
           </a:xfrm>
           <a:prstGeom prst="rect">
             <a:avLst/>
@@ -3405,8 +3405,8 @@
         </p:nvSpPr>
         <p:spPr>
           <a:xfrm>
-            <a:off x="4438538" y="1441959"/>
-            <a:ext cx="3314617" cy="4000399"/>
+            <a:off x="4312811" y="1315075"/>
+            <a:ext cx="3566071" cy="4303877"/>
           </a:xfrm>
           <a:prstGeom prst="rect">
             <a:avLst/>
@@ -3453,8 +3453,8 @@
         </p:nvSpPr>
         <p:spPr>
           <a:xfrm>
-            <a:off x="8019849" y="1441959"/>
-            <a:ext cx="3314617" cy="4000399"/>
+            <a:off x="8165807" y="1315075"/>
+            <a:ext cx="3566071" cy="4303877"/>
           </a:xfrm>
           <a:prstGeom prst="rect">
             <a:avLst/>
